--- a/01_FileNameSearch/docs/01_How_to_use.pptx
+++ b/01_FileNameSearch/docs/01_How_to_use.pptx
@@ -8,7 +8,8 @@
     <p:sldId id="256" r:id="rId2"/>
     <p:sldId id="257" r:id="rId3"/>
     <p:sldId id="261" r:id="rId4"/>
-    <p:sldId id="258" r:id="rId5"/>
+    <p:sldId id="262" r:id="rId5"/>
+    <p:sldId id="258" r:id="rId6"/>
   </p:sldIdLst>
   <p:sldSz cx="12192000" cy="6858000"/>
   <p:notesSz cx="6858000" cy="9144000"/>
@@ -262,7 +263,7 @@
           <a:p>
             <a:fld id="{0642DC08-93B6-4BA7-B72B-9701C000E1D5}" type="datetimeFigureOut">
               <a:rPr kumimoji="1" lang="ja-JP" altLang="en-US" smtClean="0"/>
-              <a:t>2026/1/1</a:t>
+              <a:t>2026/1/15</a:t>
             </a:fld>
             <a:endParaRPr kumimoji="1" lang="ja-JP" altLang="en-US"/>
           </a:p>
@@ -492,7 +493,7 @@
           <a:p>
             <a:fld id="{0642DC08-93B6-4BA7-B72B-9701C000E1D5}" type="datetimeFigureOut">
               <a:rPr kumimoji="1" lang="ja-JP" altLang="en-US" smtClean="0"/>
-              <a:t>2026/1/1</a:t>
+              <a:t>2026/1/15</a:t>
             </a:fld>
             <a:endParaRPr kumimoji="1" lang="ja-JP" altLang="en-US"/>
           </a:p>
@@ -732,7 +733,7 @@
           <a:p>
             <a:fld id="{0642DC08-93B6-4BA7-B72B-9701C000E1D5}" type="datetimeFigureOut">
               <a:rPr kumimoji="1" lang="ja-JP" altLang="en-US" smtClean="0"/>
-              <a:t>2026/1/1</a:t>
+              <a:t>2026/1/15</a:t>
             </a:fld>
             <a:endParaRPr kumimoji="1" lang="ja-JP" altLang="en-US"/>
           </a:p>
@@ -962,7 +963,7 @@
           <a:p>
             <a:fld id="{0642DC08-93B6-4BA7-B72B-9701C000E1D5}" type="datetimeFigureOut">
               <a:rPr kumimoji="1" lang="ja-JP" altLang="en-US" smtClean="0"/>
-              <a:t>2026/1/1</a:t>
+              <a:t>2026/1/15</a:t>
             </a:fld>
             <a:endParaRPr kumimoji="1" lang="ja-JP" altLang="en-US"/>
           </a:p>
@@ -1237,7 +1238,7 @@
           <a:p>
             <a:fld id="{0642DC08-93B6-4BA7-B72B-9701C000E1D5}" type="datetimeFigureOut">
               <a:rPr kumimoji="1" lang="ja-JP" altLang="en-US" smtClean="0"/>
-              <a:t>2026/1/1</a:t>
+              <a:t>2026/1/15</a:t>
             </a:fld>
             <a:endParaRPr kumimoji="1" lang="ja-JP" altLang="en-US"/>
           </a:p>
@@ -1566,7 +1567,7 @@
           <a:p>
             <a:fld id="{0642DC08-93B6-4BA7-B72B-9701C000E1D5}" type="datetimeFigureOut">
               <a:rPr kumimoji="1" lang="ja-JP" altLang="en-US" smtClean="0"/>
-              <a:t>2026/1/1</a:t>
+              <a:t>2026/1/15</a:t>
             </a:fld>
             <a:endParaRPr kumimoji="1" lang="ja-JP" altLang="en-US"/>
           </a:p>
@@ -2042,7 +2043,7 @@
           <a:p>
             <a:fld id="{0642DC08-93B6-4BA7-B72B-9701C000E1D5}" type="datetimeFigureOut">
               <a:rPr kumimoji="1" lang="ja-JP" altLang="en-US" smtClean="0"/>
-              <a:t>2026/1/1</a:t>
+              <a:t>2026/1/15</a:t>
             </a:fld>
             <a:endParaRPr kumimoji="1" lang="ja-JP" altLang="en-US"/>
           </a:p>
@@ -2183,7 +2184,7 @@
           <a:p>
             <a:fld id="{0642DC08-93B6-4BA7-B72B-9701C000E1D5}" type="datetimeFigureOut">
               <a:rPr kumimoji="1" lang="ja-JP" altLang="en-US" smtClean="0"/>
-              <a:t>2026/1/1</a:t>
+              <a:t>2026/1/15</a:t>
             </a:fld>
             <a:endParaRPr kumimoji="1" lang="ja-JP" altLang="en-US"/>
           </a:p>
@@ -2296,7 +2297,7 @@
           <a:p>
             <a:fld id="{0642DC08-93B6-4BA7-B72B-9701C000E1D5}" type="datetimeFigureOut">
               <a:rPr kumimoji="1" lang="ja-JP" altLang="en-US" smtClean="0"/>
-              <a:t>2026/1/1</a:t>
+              <a:t>2026/1/15</a:t>
             </a:fld>
             <a:endParaRPr kumimoji="1" lang="ja-JP" altLang="en-US"/>
           </a:p>
@@ -2639,7 +2640,7 @@
           <a:p>
             <a:fld id="{0642DC08-93B6-4BA7-B72B-9701C000E1D5}" type="datetimeFigureOut">
               <a:rPr kumimoji="1" lang="ja-JP" altLang="en-US" smtClean="0"/>
-              <a:t>2026/1/1</a:t>
+              <a:t>2026/1/15</a:t>
             </a:fld>
             <a:endParaRPr kumimoji="1" lang="ja-JP" altLang="en-US"/>
           </a:p>
@@ -2927,7 +2928,7 @@
           <a:p>
             <a:fld id="{0642DC08-93B6-4BA7-B72B-9701C000E1D5}" type="datetimeFigureOut">
               <a:rPr kumimoji="1" lang="ja-JP" altLang="en-US" smtClean="0"/>
-              <a:t>2026/1/1</a:t>
+              <a:t>2026/1/15</a:t>
             </a:fld>
             <a:endParaRPr kumimoji="1" lang="ja-JP" altLang="en-US"/>
           </a:p>
@@ -3200,7 +3201,7 @@
           <a:p>
             <a:fld id="{0642DC08-93B6-4BA7-B72B-9701C000E1D5}" type="datetimeFigureOut">
               <a:rPr kumimoji="1" lang="ja-JP" altLang="en-US" smtClean="0"/>
-              <a:t>2026/1/1</a:t>
+              <a:t>2026/1/15</a:t>
             </a:fld>
             <a:endParaRPr kumimoji="1" lang="ja-JP" altLang="en-US"/>
           </a:p>
@@ -4261,6 +4262,224 @@
 </file>
 
 <file path=ppt/slides/slide4.xml><?xml version="1.0" encoding="utf-8"?>
+<p:sld xmlns:a="http://schemas.openxmlformats.org/drawingml/2006/main" xmlns:r="http://schemas.openxmlformats.org/officeDocument/2006/relationships" xmlns:p="http://schemas.openxmlformats.org/presentationml/2006/main">
+  <p:cSld>
+    <p:spTree>
+      <p:nvGrpSpPr>
+        <p:cNvPr id="1" name="">
+          <a:extLst>
+            <a:ext uri="{FF2B5EF4-FFF2-40B4-BE49-F238E27FC236}">
+              <a16:creationId xmlns:a16="http://schemas.microsoft.com/office/drawing/2014/main" id="{6530FD5B-01AF-B72C-DE10-8203343257E4}"/>
+            </a:ext>
+          </a:extLst>
+        </p:cNvPr>
+        <p:cNvGrpSpPr/>
+        <p:nvPr/>
+      </p:nvGrpSpPr>
+      <p:grpSpPr>
+        <a:xfrm>
+          <a:off x="0" y="0"/>
+          <a:ext cx="0" cy="0"/>
+          <a:chOff x="0" y="0"/>
+          <a:chExt cx="0" cy="0"/>
+        </a:xfrm>
+      </p:grpSpPr>
+      <p:pic>
+        <p:nvPicPr>
+          <p:cNvPr id="4" name="図 3" descr="テーブル">
+            <a:extLst>
+              <a:ext uri="{FF2B5EF4-FFF2-40B4-BE49-F238E27FC236}">
+                <a16:creationId xmlns:a16="http://schemas.microsoft.com/office/drawing/2014/main" id="{E2382C85-056D-0CED-A227-AB0DED3DF7E3}"/>
+              </a:ext>
+            </a:extLst>
+          </p:cNvPr>
+          <p:cNvPicPr>
+            <a:picLocks noChangeAspect="1"/>
+          </p:cNvPicPr>
+          <p:nvPr/>
+        </p:nvPicPr>
+        <p:blipFill>
+          <a:blip r:embed="rId2"/>
+          <a:stretch>
+            <a:fillRect/>
+          </a:stretch>
+        </p:blipFill>
+        <p:spPr>
+          <a:xfrm>
+            <a:off x="838200" y="1023730"/>
+            <a:ext cx="6077798" cy="3410426"/>
+          </a:xfrm>
+          <a:prstGeom prst="rect">
+            <a:avLst/>
+          </a:prstGeom>
+        </p:spPr>
+      </p:pic>
+      <p:sp>
+        <p:nvSpPr>
+          <p:cNvPr id="2" name="タイトル 1">
+            <a:extLst>
+              <a:ext uri="{FF2B5EF4-FFF2-40B4-BE49-F238E27FC236}">
+                <a16:creationId xmlns:a16="http://schemas.microsoft.com/office/drawing/2014/main" id="{684C3805-55A4-B75F-F903-B060B1F4FF6D}"/>
+              </a:ext>
+            </a:extLst>
+          </p:cNvPr>
+          <p:cNvSpPr>
+            <a:spLocks noGrp="1"/>
+          </p:cNvSpPr>
+          <p:nvPr>
+            <p:ph type="title"/>
+          </p:nvPr>
+        </p:nvSpPr>
+        <p:spPr>
+          <a:xfrm>
+            <a:off x="838200" y="365125"/>
+            <a:ext cx="10515600" cy="658605"/>
+          </a:xfrm>
+        </p:spPr>
+        <p:txBody>
+          <a:bodyPr>
+            <a:normAutofit fontScale="90000"/>
+          </a:bodyPr>
+          <a:lstStyle/>
+          <a:p>
+            <a:r>
+              <a:rPr kumimoji="1" lang="ja-JP" altLang="en-US" b="1" dirty="0"/>
+              <a:t>３．</a:t>
+            </a:r>
+            <a:r>
+              <a:rPr lang="ja-JP" altLang="en-US" b="1" dirty="0"/>
+              <a:t>「送る」</a:t>
+            </a:r>
+            <a:r>
+              <a:rPr kumimoji="1" lang="ja-JP" altLang="en-US" b="1" dirty="0"/>
+              <a:t>登録</a:t>
+            </a:r>
+          </a:p>
+        </p:txBody>
+      </p:sp>
+      <p:sp>
+        <p:nvSpPr>
+          <p:cNvPr id="7" name="テキスト ボックス 6">
+            <a:extLst>
+              <a:ext uri="{FF2B5EF4-FFF2-40B4-BE49-F238E27FC236}">
+                <a16:creationId xmlns:a16="http://schemas.microsoft.com/office/drawing/2014/main" id="{C55D01DE-D3DC-55E3-6121-031EA5152BC7}"/>
+              </a:ext>
+            </a:extLst>
+          </p:cNvPr>
+          <p:cNvSpPr txBox="1"/>
+          <p:nvPr/>
+        </p:nvSpPr>
+        <p:spPr>
+          <a:xfrm>
+            <a:off x="7921486" y="1023730"/>
+            <a:ext cx="3807591" cy="1754326"/>
+          </a:xfrm>
+          <a:prstGeom prst="rect">
+            <a:avLst/>
+          </a:prstGeom>
+          <a:noFill/>
+        </p:spPr>
+        <p:txBody>
+          <a:bodyPr wrap="square" rtlCol="0">
+            <a:spAutoFit/>
+          </a:bodyPr>
+          <a:lstStyle/>
+          <a:p>
+            <a:r>
+              <a:rPr lang="en-US" altLang="ja-JP" dirty="0"/>
+              <a:t>1)</a:t>
+            </a:r>
+            <a:r>
+              <a:rPr lang="ja-JP" altLang="en-US" dirty="0"/>
+              <a:t>送るフォルダに登録するとフォルダを右クリックで直感的に検索できます。</a:t>
+            </a:r>
+            <a:endParaRPr lang="en-US" altLang="ja-JP" dirty="0"/>
+          </a:p>
+          <a:p>
+            <a:endParaRPr kumimoji="1" lang="en-US" altLang="ja-JP" dirty="0"/>
+          </a:p>
+          <a:p>
+            <a:r>
+              <a:rPr lang="ja-JP" altLang="en-US" dirty="0"/>
+              <a:t>エクスプローラに</a:t>
+            </a:r>
+            <a:r>
+              <a:rPr lang="en-US" altLang="ja-JP" dirty="0" err="1"/>
+              <a:t>shell:sendto</a:t>
+            </a:r>
+            <a:r>
+              <a:rPr lang="ja-JP" altLang="en-US" dirty="0"/>
+              <a:t>を入力するとフォルダに移動できます。</a:t>
+            </a:r>
+          </a:p>
+        </p:txBody>
+      </p:sp>
+      <p:sp>
+        <p:nvSpPr>
+          <p:cNvPr id="11" name="正方形/長方形 10">
+            <a:extLst>
+              <a:ext uri="{FF2B5EF4-FFF2-40B4-BE49-F238E27FC236}">
+                <a16:creationId xmlns:a16="http://schemas.microsoft.com/office/drawing/2014/main" id="{FFBD8190-106A-8ED4-FB56-4163E19733DE}"/>
+              </a:ext>
+            </a:extLst>
+          </p:cNvPr>
+          <p:cNvSpPr/>
+          <p:nvPr/>
+        </p:nvSpPr>
+        <p:spPr>
+          <a:xfrm>
+            <a:off x="838200" y="1242604"/>
+            <a:ext cx="3475383" cy="381290"/>
+          </a:xfrm>
+          <a:prstGeom prst="rect">
+            <a:avLst/>
+          </a:prstGeom>
+          <a:noFill/>
+          <a:ln>
+            <a:solidFill>
+              <a:srgbClr val="FF0000"/>
+            </a:solidFill>
+          </a:ln>
+        </p:spPr>
+        <p:style>
+          <a:lnRef idx="2">
+            <a:schemeClr val="accent1">
+              <a:shade val="15000"/>
+            </a:schemeClr>
+          </a:lnRef>
+          <a:fillRef idx="1">
+            <a:schemeClr val="accent1"/>
+          </a:fillRef>
+          <a:effectRef idx="0">
+            <a:schemeClr val="accent1"/>
+          </a:effectRef>
+          <a:fontRef idx="minor">
+            <a:schemeClr val="lt1"/>
+          </a:fontRef>
+        </p:style>
+        <p:txBody>
+          <a:bodyPr rtlCol="0" anchor="ctr"/>
+          <a:lstStyle/>
+          <a:p>
+            <a:pPr algn="ctr"/>
+            <a:endParaRPr kumimoji="1" lang="ja-JP" altLang="en-US"/>
+          </a:p>
+        </p:txBody>
+      </p:sp>
+    </p:spTree>
+    <p:extLst>
+      <p:ext uri="{BB962C8B-B14F-4D97-AF65-F5344CB8AC3E}">
+        <p14:creationId xmlns:p14="http://schemas.microsoft.com/office/powerpoint/2010/main" val="1754135672"/>
+      </p:ext>
+    </p:extLst>
+  </p:cSld>
+  <p:clrMapOvr>
+    <a:masterClrMapping/>
+  </p:clrMapOvr>
+</p:sld>
+</file>
+
+<file path=ppt/slides/slide5.xml><?xml version="1.0" encoding="utf-8"?>
 <p:sld xmlns:a="http://schemas.openxmlformats.org/drawingml/2006/main" xmlns:r="http://schemas.openxmlformats.org/officeDocument/2006/relationships" xmlns:p="http://schemas.openxmlformats.org/presentationml/2006/main">
   <p:cSld>
     <p:spTree>
